--- a/docs/Kalpitiya_Deforestation_Presentation.pptx
+++ b/docs/Kalpitiya_Deforestation_Presentation.pptx
@@ -297,8 +297,55 @@
           <a:lstStyle/>
           <a:p>
             <a:r>
-              <a:rPr lang="en-US" dirty="0"/>
-              <a:t>Welcome and introduce yourselves. State the project title – Deforestation and Land Cover Change Analysis of the Kalpitiya Peninsula. Briefly explain this was your group's image processing project using Landsat satellite data covering 2016 to 2025. Mention the programme – HNDCSAI 25.2. Keep it short, about 20 seconds, and hand over to the next speaker.</a:t>
+              <a:rPr lang="en-US" sz="1400" baseline="0" dirty="0"/>
+              <a:t>“Good morning everyone. </a:t>
+            </a:r>
+          </a:p>
+          <a:p>
+            <a:endParaRPr lang="en-US" sz="1400" baseline="0" dirty="0"/>
+          </a:p>
+          <a:p>
+            <a:r>
+              <a:rPr lang="en-US" sz="1400" baseline="0" dirty="0"/>
+              <a:t>Today we are presenting our Image Processing group project titled </a:t>
+            </a:r>
+            <a:r>
+              <a:rPr lang="en-US" sz="1400" i="1" baseline="0" dirty="0"/>
+              <a:t>Deforestation and Land Cover Change Analysis in the </a:t>
+            </a:r>
+            <a:r>
+              <a:rPr lang="en-US" sz="1400" i="1" baseline="0" dirty="0" err="1"/>
+              <a:t>Kalpitiya</a:t>
+            </a:r>
+            <a:r>
+              <a:rPr lang="en-US" sz="1400" i="1" baseline="0" dirty="0"/>
+              <a:t> Peninsula, Sri Lanka using Landsat Satellite Imagery, Machine Learning Classification and Vegetation Trend Forecasting.</a:t>
+            </a:r>
+          </a:p>
+          <a:p>
+            <a:endParaRPr lang="en-US" sz="1400" baseline="0" dirty="0"/>
+          </a:p>
+          <a:p>
+            <a:r>
+              <a:rPr lang="en-US" sz="1400" baseline="0" dirty="0"/>
+              <a:t>In this project, we </a:t>
+            </a:r>
+            <a:r>
+              <a:rPr lang="en-US" sz="1400" baseline="0" dirty="0" err="1"/>
+              <a:t>analysed</a:t>
+            </a:r>
+            <a:r>
+              <a:rPr lang="en-US" sz="1400" baseline="0" dirty="0"/>
+              <a:t> land cover changes from 2016 to 2025 using satellite imagery and machine learning techniques.”</a:t>
+            </a:r>
+          </a:p>
+          <a:p>
+            <a:endParaRPr lang="en-US" sz="1400" baseline="0" dirty="0"/>
+          </a:p>
+          <a:p>
+            <a:r>
+              <a:rPr lang="en-US" sz="1400" baseline="0" dirty="0"/>
+              <a:t>“First, I will introduce the environmental problem and background of the study.”</a:t>
             </a:r>
           </a:p>
         </p:txBody>
@@ -385,7 +432,51 @@
           <a:p>
             <a:r>
               <a:rPr lang="en-US" dirty="0"/>
-              <a:t>This is one of the most important slides. Point to the NDVI map. On the left is the 2016 baseline – lots of green. In the middle is the 2025 version of the same calendar month – you can immediately see much more red. On the right is the delta map – red means NDVI went down, which means vegetation was lost. The small blue patch in the north is the only area showing some vegetation gain. The key finding in the stats: between 2022 and 2023, we recorded the largest loss – over 11,000 hectares net, and an 82% loss relative to the initial vegetated area. There was some recovery in early 2025 which is encouraging, but the long-term trend is still negative.</a:t>
+              <a:t>“This slide presents our NDVI change detection results.</a:t>
+            </a:r>
+          </a:p>
+          <a:p>
+            <a:endParaRPr lang="en-US" dirty="0"/>
+          </a:p>
+          <a:p>
+            <a:r>
+              <a:rPr lang="en-US" dirty="0"/>
+              <a:t>On the left is the baseline NDVI map from 2016, while the </a:t>
+            </a:r>
+            <a:r>
+              <a:rPr lang="en-US" dirty="0" err="1"/>
+              <a:t>centre</a:t>
+            </a:r>
+            <a:r>
+              <a:rPr lang="en-US" dirty="0"/>
+              <a:t> image shows the matching period in 2025.</a:t>
+            </a:r>
+          </a:p>
+          <a:p>
+            <a:endParaRPr lang="en-US" dirty="0"/>
+          </a:p>
+          <a:p>
+            <a:r>
+              <a:rPr lang="en-US" dirty="0"/>
+              <a:t>On the right is the delta NDVI map, where red indicates vegetation loss and blue indicates vegetation gain.</a:t>
+            </a:r>
+          </a:p>
+          <a:p>
+            <a:endParaRPr lang="en-US" dirty="0"/>
+          </a:p>
+          <a:p>
+            <a:r>
+              <a:rPr lang="en-US" dirty="0"/>
+              <a:t>The results clearly show an overall decline in vegetation, especially in the southern and interior regions.</a:t>
+            </a:r>
+          </a:p>
+          <a:p>
+            <a:endParaRPr lang="en-US" dirty="0"/>
+          </a:p>
+          <a:p>
+            <a:r>
+              <a:rPr lang="en-US" dirty="0"/>
+              <a:t>The largest vegetation loss occurred between 2022 and 2023, with over 11,000 hectares of net loss.”</a:t>
             </a:r>
           </a:p>
         </p:txBody>
@@ -472,8 +563,38 @@
           <a:p>
             <a:r>
               <a:rPr lang="en-US" dirty="0"/>
-              <a:t>The transition matrix shows which land cover classes changed between 2016 and 2025. The Vegetation row is the most important – it shows how much of the 2016 vegetation ended up as something else. A lot moved to Water, which partly reflects the lagoon boundary shifting, and also some genuine inundation near the coast. Bare Soil transitions are more clearly land clearance. The deforestation rates graph on the right shows the episodic nature of loss – most years had moderate rates but 2020 and 2022–2025 had major spikes. The partial regrowth in 2024-2025 is a positive sign.</a:t>
-            </a:r>
+              <a:t>“The transition matrix helps explain how land cover changed from 2016 to 2025.</a:t>
+            </a:r>
+          </a:p>
+          <a:p>
+            <a:endParaRPr lang="en-US" dirty="0"/>
+          </a:p>
+          <a:p>
+            <a:r>
+              <a:rPr lang="en-US" dirty="0"/>
+              <a:t>A large proportion of vegetation changed into water and bare soil, indicating land clearance and lagoon-related changes.</a:t>
+            </a:r>
+          </a:p>
+          <a:p>
+            <a:endParaRPr lang="en-US" dirty="0"/>
+          </a:p>
+          <a:p>
+            <a:r>
+              <a:rPr lang="en-US" dirty="0"/>
+              <a:t>The graph also shows that vegetation loss was not constant but occurred in spikes, especially between 2022 and 2023.</a:t>
+            </a:r>
+          </a:p>
+          <a:p>
+            <a:endParaRPr lang="en-US" dirty="0"/>
+          </a:p>
+          <a:p>
+            <a:r>
+              <a:rPr lang="en-US" dirty="0"/>
+              <a:t>Some partial recovery appeared between late 2024 and early 2025.”</a:t>
+            </a:r>
+          </a:p>
+          <a:p>
+            <a:endParaRPr lang="en-US" dirty="0"/>
           </a:p>
         </p:txBody>
       </p:sp>
@@ -559,8 +680,38 @@
           <a:p>
             <a:r>
               <a:rPr lang="en-US" dirty="0"/>
-              <a:t>This slide shows our forecasting results. The top panel of the summary figure is the most important – the dark green line is the smoothed historical NDVI, the red line is the ensemble forecast, and the shaded region is the 95% confidence interval. You can see the sharp dip around 2022–2023, and the forecast projects a continued gradual decline if current trends hold. The confidence interval widens a lot by 2030, which is honest – these are statistical extrapolations, not precise predictions. The three model cards on the right explain what each model contributes. Mention the limitation – we didn't include rainfall data or land-use policy, so this is a baseline trend forecast.</a:t>
-            </a:r>
+              <a:t>“To forecast future vegetation trends, we used three regression models: Linear Regression, Polynomial Regression, and Gradient Boosting.</a:t>
+            </a:r>
+          </a:p>
+          <a:p>
+            <a:endParaRPr lang="en-US" dirty="0"/>
+          </a:p>
+          <a:p>
+            <a:r>
+              <a:rPr lang="en-US" dirty="0"/>
+              <a:t>We combined them into an ensemble forecast to improve reliability.</a:t>
+            </a:r>
+          </a:p>
+          <a:p>
+            <a:endParaRPr lang="en-US" dirty="0"/>
+          </a:p>
+          <a:p>
+            <a:r>
+              <a:rPr lang="en-US" dirty="0"/>
+              <a:t>The forecast suggests that vegetation may continue to decline if current land-use patterns continue.</a:t>
+            </a:r>
+          </a:p>
+          <a:p>
+            <a:endParaRPr lang="en-US" dirty="0"/>
+          </a:p>
+          <a:p>
+            <a:r>
+              <a:rPr lang="en-US" dirty="0"/>
+              <a:t>However, the confidence interval widens over time, showing that uncertainty increases toward 2030.</a:t>
+            </a:r>
+          </a:p>
+          <a:p>
+            <a:endParaRPr lang="en-US" dirty="0"/>
           </a:p>
         </p:txBody>
       </p:sp>
@@ -646,7 +797,25 @@
           <a:p>
             <a:r>
               <a:rPr lang="en-US" dirty="0"/>
-              <a:t>Summarise the key findings. The vegetation cover declined overall – this is clear from both the NDVI trend and the classified maps. The 2022–2023 period had the steepest drop. However, the 2025 data suggests some recovery is happening, which is encouraging. On the classification side, including spectral indices in the model genuinely improved performance. The land cover trend graph on the top right shows vegetation area rising and falling over the years, with the lowest point around 2022–2023. The loss vs gain bars on the bottom right reinforce the episodic nature of the changes.</a:t>
+              <a:t>“Overall, the project shows a negative vegetation trend between 2016 and 2025.</a:t>
+            </a:r>
+          </a:p>
+          <a:p>
+            <a:endParaRPr lang="en-US" dirty="0"/>
+          </a:p>
+          <a:p>
+            <a:r>
+              <a:rPr lang="en-US" dirty="0"/>
+              <a:t>The strongest decline occurred around 2022–2023, while 2025 showed some signs of recovery.</a:t>
+            </a:r>
+          </a:p>
+          <a:p>
+            <a:endParaRPr lang="en-US" dirty="0"/>
+          </a:p>
+          <a:p>
+            <a:r>
+              <a:rPr lang="en-US" dirty="0"/>
+              <a:t>The Random Forest classifier also performed better when spectral indices were included, proving that feature engineering improved classification quality.”</a:t>
             </a:r>
           </a:p>
         </p:txBody>
@@ -714,7 +883,21 @@
             <p:ph type="sldImg"/>
           </p:nvPr>
         </p:nvSpPr>
-        <p:spPr/>
+        <p:spPr>
+          <a:xfrm>
+            <a:off x="-171450" y="1143000"/>
+            <a:ext cx="5486400" cy="3086100"/>
+          </a:xfrm>
+          <a:prstGeom prst="rect">
+            <a:avLst/>
+          </a:prstGeom>
+          <a:noFill/>
+          <a:ln w="12700">
+            <a:solidFill>
+              <a:prstClr val="black"/>
+            </a:solidFill>
+          </a:ln>
+        </p:spPr>
       </p:sp>
       <p:sp>
         <p:nvSpPr>
@@ -726,45 +909,59 @@
             <p:ph type="body" idx="1"/>
           </p:nvPr>
         </p:nvSpPr>
-        <p:spPr/>
+        <p:spPr>
+          <a:xfrm>
+            <a:off x="514350" y="4400550"/>
+            <a:ext cx="4114800" cy="3600450"/>
+          </a:xfrm>
+          <a:prstGeom prst="rect">
+            <a:avLst/>
+          </a:prstGeom>
+        </p:spPr>
         <p:txBody>
           <a:bodyPr/>
           <a:lstStyle/>
           <a:p>
             <a:r>
               <a:rPr lang="en-US" dirty="0"/>
-              <a:t>Wrap up the project. Run through the four main findings quickly. The key takeaway is that vegetation has declined, the method worked, and the forecasting points to continued pressure if nothing changes. Be honest about the limitations – particularly the pseudo-labelling issue and the 60 m resolution. End on a positive note – remote sensing like this is genuinely useful for countries like Sri Lanka where field monitoring is limited and expensive. Mention future work briefly, especially the upgrade to Sentinel-2. Thank the lecturer and audience.</a:t>
-            </a:r>
-          </a:p>
-        </p:txBody>
-      </p:sp>
-      <p:sp>
-        <p:nvSpPr>
-          <p:cNvPr id="4" name="Slide Number Placeholder 3"/>
-          <p:cNvSpPr>
-            <a:spLocks noGrp="1"/>
-          </p:cNvSpPr>
-          <p:nvPr>
-            <p:ph type="sldNum" sz="quarter" idx="10"/>
-          </p:nvPr>
-        </p:nvSpPr>
-        <p:spPr/>
-        <p:txBody>
-          <a:bodyPr/>
-          <a:lstStyle/>
-          <a:p>
-            <a:fld id="{F7021451-1387-4CA6-816F-3879F97B5CBC}" type="slidenum">
-              <a:rPr lang="en-US"/>
-              <a:t>15</a:t>
-            </a:fld>
-            <a:endParaRPr lang="en-US"/>
+              <a:t>“Like any study, there were limitations. Our 60-metre resolution could miss small land changes, cloud cover reduced usable observations, and pseudo-labelling lacks real ground truth validation.</a:t>
+            </a:r>
+          </a:p>
+          <a:p>
+            <a:endParaRPr lang="en-US" dirty="0"/>
+          </a:p>
+          <a:p>
+            <a:r>
+              <a:rPr lang="en-US" dirty="0"/>
+              <a:t>In future work, higher-resolution Sentinel-2 imagery and field validation could improve results.</a:t>
+            </a:r>
+          </a:p>
+          <a:p>
+            <a:endParaRPr lang="en-US" dirty="0"/>
+          </a:p>
+          <a:p>
+            <a:r>
+              <a:rPr lang="en-US" dirty="0"/>
+              <a:t>To conclude, vegetation in </a:t>
+            </a:r>
+            <a:r>
+              <a:rPr lang="en-US" dirty="0" err="1"/>
+              <a:t>Kalpitiya</a:t>
+            </a:r>
+            <a:r>
+              <a:rPr lang="en-US" dirty="0"/>
+              <a:t> has generally declined over the last nine years, and remote sensing combined with machine learning proved to be a useful and low-cost approach for environmental monitoring.”</a:t>
+            </a:r>
+          </a:p>
+          <a:p>
+            <a:endParaRPr lang="en-US" dirty="0"/>
           </a:p>
         </p:txBody>
       </p:sp>
     </p:spTree>
     <p:extLst>
       <p:ext uri="{BB962C8B-B14F-4D97-AF65-F5344CB8AC3E}">
-        <p14:creationId xmlns:p14="http://schemas.microsoft.com/office/powerpoint/2010/main" val="1024086991"/>
+        <p14:creationId xmlns:p14="http://schemas.microsoft.com/office/powerpoint/2010/main" val="4247531087"/>
       </p:ext>
     </p:extLst>
   </p:cSld>
@@ -820,7 +1017,130 @@
           <a:p>
             <a:r>
               <a:rPr lang="en-US" dirty="0"/>
-              <a:t>Thank the audience and open the floor for questions. Be confident. If you don't know an answer, it's fine to say 'we didn't test that in this project but it would be an interesting direction' or 'that would require ground truth data which was outside our scope.' Stay calm and refer back to the slides if needed.</a:t>
+              <a:t>Wrap up the project. Run through the four main findings quickly. </a:t>
+            </a:r>
+          </a:p>
+          <a:p>
+            <a:endParaRPr lang="en-US" dirty="0"/>
+          </a:p>
+          <a:p>
+            <a:r>
+              <a:rPr lang="en-US" dirty="0"/>
+              <a:t>The key takeaway is that vegetation has declined, the method worked, and the forecasting points to continued pressure if nothing changes. </a:t>
+            </a:r>
+          </a:p>
+          <a:p>
+            <a:endParaRPr lang="en-US" dirty="0"/>
+          </a:p>
+          <a:p>
+            <a:r>
+              <a:rPr lang="en-US" dirty="0"/>
+              <a:t>Be honest about the limitations – particularly the pseudo-labelling issue and the 60 m resolution. </a:t>
+            </a:r>
+          </a:p>
+          <a:p>
+            <a:endParaRPr lang="en-US" dirty="0"/>
+          </a:p>
+          <a:p>
+            <a:r>
+              <a:rPr lang="en-US" dirty="0"/>
+              <a:t>End on a positive note – remote sensing like this is genuinely useful for countries like Sri Lanka where field monitoring is limited and expensive. </a:t>
+            </a:r>
+          </a:p>
+          <a:p>
+            <a:endParaRPr lang="en-US" dirty="0"/>
+          </a:p>
+          <a:p>
+            <a:r>
+              <a:rPr lang="en-US" dirty="0"/>
+              <a:t>Mention future work briefly, especially the upgrade to Sentinel-2. Thank the lecturer and audience.</a:t>
+            </a:r>
+          </a:p>
+        </p:txBody>
+      </p:sp>
+      <p:sp>
+        <p:nvSpPr>
+          <p:cNvPr id="4" name="Slide Number Placeholder 3"/>
+          <p:cNvSpPr>
+            <a:spLocks noGrp="1"/>
+          </p:cNvSpPr>
+          <p:nvPr>
+            <p:ph type="sldNum" sz="quarter" idx="10"/>
+          </p:nvPr>
+        </p:nvSpPr>
+        <p:spPr/>
+        <p:txBody>
+          <a:bodyPr/>
+          <a:lstStyle/>
+          <a:p>
+            <a:fld id="{F7021451-1387-4CA6-816F-3879F97B5CBC}" type="slidenum">
+              <a:rPr lang="en-US"/>
+              <a:t>15</a:t>
+            </a:fld>
+            <a:endParaRPr lang="en-US"/>
+          </a:p>
+        </p:txBody>
+      </p:sp>
+    </p:spTree>
+    <p:extLst>
+      <p:ext uri="{BB962C8B-B14F-4D97-AF65-F5344CB8AC3E}">
+        <p14:creationId xmlns:p14="http://schemas.microsoft.com/office/powerpoint/2010/main" val="1024086991"/>
+      </p:ext>
+    </p:extLst>
+  </p:cSld>
+  <p:clrMapOvr>
+    <a:masterClrMapping/>
+  </p:clrMapOvr>
+</p:notes>
+</file>
+
+<file path=ppt/notesSlides/notesSlide16.xml><?xml version="1.0" encoding="utf-8"?>
+<p:notes xmlns:a="http://schemas.openxmlformats.org/drawingml/2006/main" xmlns:r="http://schemas.openxmlformats.org/officeDocument/2006/relationships" xmlns:p="http://schemas.openxmlformats.org/presentationml/2006/main">
+  <p:cSld>
+    <p:spTree>
+      <p:nvGrpSpPr>
+        <p:cNvPr id="1" name=""/>
+        <p:cNvGrpSpPr/>
+        <p:nvPr/>
+      </p:nvGrpSpPr>
+      <p:grpSpPr>
+        <a:xfrm>
+          <a:off x="0" y="0"/>
+          <a:ext cx="0" cy="0"/>
+          <a:chOff x="0" y="0"/>
+          <a:chExt cx="0" cy="0"/>
+        </a:xfrm>
+      </p:grpSpPr>
+      <p:sp>
+        <p:nvSpPr>
+          <p:cNvPr id="2" name="Slide Image Placeholder 1"/>
+          <p:cNvSpPr>
+            <a:spLocks noGrp="1" noRot="1" noChangeAspect="1"/>
+          </p:cNvSpPr>
+          <p:nvPr>
+            <p:ph type="sldImg"/>
+          </p:nvPr>
+        </p:nvSpPr>
+        <p:spPr/>
+      </p:sp>
+      <p:sp>
+        <p:nvSpPr>
+          <p:cNvPr id="3" name="Notes Placeholder 2"/>
+          <p:cNvSpPr>
+            <a:spLocks noGrp="1"/>
+          </p:cNvSpPr>
+          <p:nvPr>
+            <p:ph type="body" idx="1"/>
+          </p:nvPr>
+        </p:nvSpPr>
+        <p:spPr/>
+        <p:txBody>
+          <a:bodyPr/>
+          <a:lstStyle/>
+          <a:p>
+            <a:r>
+              <a:rPr lang="en-US" dirty="0"/>
+              <a:t>“Thank you for listening. We are now happy to take any questions.”</a:t>
             </a:r>
           </a:p>
         </p:txBody>
@@ -907,7 +1227,59 @@
           <a:p>
             <a:r>
               <a:rPr lang="en-US" dirty="0"/>
-              <a:t>Introduce deforestation as a major environmental issue, especially for coastal countries like Sri Lanka. Explain that traditional field monitoring is very limited, so satellite remote sensing is a practical and cost-effective alternative. Describe Kalpitiya briefly – it's a coastal strip with a mix of scrubland, mangroves, and agricultural patches under growing pressure from development. Mention the key stats: 20 Landsat scenes, 9 years of data from 2016 to 2025.</a:t>
+              <a:t>“Deforestation means the permanent removal of forests or vegetation, usually due to agriculture, aquaculture, settlements, or urban development.</a:t>
+            </a:r>
+          </a:p>
+          <a:p>
+            <a:endParaRPr lang="en-US" dirty="0"/>
+          </a:p>
+          <a:p>
+            <a:r>
+              <a:rPr lang="en-US" dirty="0"/>
+              <a:t>This is an important environmental issue because vegetation loss affects biodiversity, coastal stability, water cycles, and even carbon emissions.</a:t>
+            </a:r>
+          </a:p>
+          <a:p>
+            <a:endParaRPr lang="en-US" dirty="0"/>
+          </a:p>
+          <a:p>
+            <a:r>
+              <a:rPr lang="en-US" dirty="0"/>
+              <a:t>Traditional field surveys are expensive and time-consuming, especially across large regions. Because of this, satellite remote sensing has become a practical solution since it provides repeatable observations over long periods of time.</a:t>
+            </a:r>
+          </a:p>
+          <a:p>
+            <a:endParaRPr lang="en-US" dirty="0"/>
+          </a:p>
+          <a:p>
+            <a:r>
+              <a:rPr lang="en-US" dirty="0"/>
+              <a:t>Our study area is the </a:t>
+            </a:r>
+            <a:r>
+              <a:rPr lang="en-US" dirty="0" err="1"/>
+              <a:t>Kalpitiya</a:t>
+            </a:r>
+            <a:r>
+              <a:rPr lang="en-US" dirty="0"/>
+              <a:t> Peninsula in Sri Lanka, a coastal region located between the Indian Ocean and Puttalam Lagoon. It contains scrubland, mangroves, salt pans, and settlements that are under increasing environmental pressure.</a:t>
+            </a:r>
+          </a:p>
+          <a:p>
+            <a:endParaRPr lang="en-US" dirty="0"/>
+          </a:p>
+          <a:p>
+            <a:r>
+              <a:rPr lang="en-US" dirty="0"/>
+              <a:t>For this study, we </a:t>
+            </a:r>
+            <a:r>
+              <a:rPr lang="en-US" dirty="0" err="1"/>
+              <a:t>analysed</a:t>
+            </a:r>
+            <a:r>
+              <a:rPr lang="en-US" dirty="0"/>
+              <a:t> 20 Landsat scenes covering 9 years, from 2016 to 2025.”</a:t>
             </a:r>
           </a:p>
         </p:txBody>
@@ -994,8 +1366,46 @@
           <a:p>
             <a:r>
               <a:rPr lang="en-US" dirty="0"/>
-              <a:t>Talk through each background point briefly. Sri Lanka has real environmental challenges and Kalpitiya is a good case study because it has cloud-free imagery in the dry season and shows genuine land use pressure. Satellite imagery from Landsat has been running since 1972 so we have decades of data to work with. Spectral indices let us go beyond visible colour – NDVI for vegetation, NDWI for water, and so on. Random Forest is a well-established machine learning method, and combining everything into a forecasting pipeline is what makes this project more than just basic mapping.</a:t>
-            </a:r>
+              <a:t>“In Sri Lanka, vegetation loss has become an increasing issue in coastal and semi-arid regions due to development and land-use change. </a:t>
+            </a:r>
+            <a:r>
+              <a:rPr lang="en-US" dirty="0" err="1"/>
+              <a:t>Kalpitiya</a:t>
+            </a:r>
+            <a:r>
+              <a:rPr lang="en-US" dirty="0"/>
+              <a:t> is one of the regions experiencing this pressure.</a:t>
+            </a:r>
+          </a:p>
+          <a:p>
+            <a:endParaRPr lang="en-US" dirty="0"/>
+          </a:p>
+          <a:p>
+            <a:r>
+              <a:rPr lang="en-US" dirty="0"/>
+              <a:t>To monitor these changes, we used satellite remote sensing. Landsat satellites have provided Earth observations since 1972 and can capture spectral information beyond normal human vision.</a:t>
+            </a:r>
+          </a:p>
+          <a:p>
+            <a:endParaRPr lang="en-US" dirty="0"/>
+          </a:p>
+          <a:p>
+            <a:r>
+              <a:rPr lang="en-US" dirty="0"/>
+              <a:t>We also used spectral indices such as NDVI for vegetation, NDWI for water, and NDBI for built-up areas. These mathematical combinations help transform raw satellite data into meaningful environmental measurements.</a:t>
+            </a:r>
+          </a:p>
+          <a:p>
+            <a:endParaRPr lang="en-US" dirty="0"/>
+          </a:p>
+          <a:p>
+            <a:r>
+              <a:rPr lang="en-US" dirty="0"/>
+              <a:t>For classification, we used a Random Forest machine learning model to automatically map land cover types. Finally, we used change detection and forecasting methods to understand how vegetation changed over time and predict future trends.”</a:t>
+            </a:r>
+          </a:p>
+          <a:p>
+            <a:endParaRPr lang="en-US" dirty="0"/>
           </a:p>
         </p:txBody>
       </p:sp>
@@ -1081,7 +1491,45 @@
           <a:p>
             <a:r>
               <a:rPr lang="en-US" dirty="0"/>
-              <a:t>Run through the six objectives. Emphasise that this is an end-to-end pipeline – we didn't just produce maps, we also forecasted future trends. Objective 4 and 5 are probably the most interesting from a results perspective, so hint that those will be covered in detail shortly. This slide should take about 30 seconds.</a:t>
+              <a:t>“The main objective of this project was to build a complete end-to-end environmental monitoring pipeline.</a:t>
+            </a:r>
+          </a:p>
+          <a:p>
+            <a:endParaRPr lang="en-US" dirty="0"/>
+          </a:p>
+          <a:p>
+            <a:r>
+              <a:rPr lang="en-US" dirty="0"/>
+              <a:t>First, we </a:t>
+            </a:r>
+            <a:r>
+              <a:rPr lang="en-US" dirty="0" err="1"/>
+              <a:t>organised</a:t>
+            </a:r>
+            <a:r>
+              <a:rPr lang="en-US" dirty="0"/>
+              <a:t> and preprocessed satellite imagery. Then we calculated spectral indices and classified land cover into four categories: water, vegetation, bare soil, and built-up land.</a:t>
+            </a:r>
+          </a:p>
+          <a:p>
+            <a:endParaRPr lang="en-US" dirty="0"/>
+          </a:p>
+          <a:p>
+            <a:r>
+              <a:rPr lang="en-US" dirty="0"/>
+              <a:t>Finally, we detected vegetation changes over time and forecasted future NDVI trends up to 2030.”</a:t>
+            </a:r>
+          </a:p>
+          <a:p>
+            <a:endParaRPr lang="en-US" dirty="0"/>
+          </a:p>
+          <a:p>
+            <a:endParaRPr lang="en-US" dirty="0"/>
+          </a:p>
+          <a:p>
+            <a:r>
+              <a:rPr lang="en-US" dirty="0"/>
+              <a:t>“Now I’ll hand over to Member 2, who will explain our dataset and preprocessing stage.”</a:t>
             </a:r>
           </a:p>
         </p:txBody>
@@ -1168,8 +1616,46 @@
           <a:p>
             <a:r>
               <a:rPr lang="en-US" dirty="0"/>
-              <a:t>Introduce the dataset. We used Landsat Level-2 Surface Reflectance products from USGS. The scenes were deliberately chosen from February and March each year because cloud cover is lowest in the North Western Province during the dry season. Landsat 8 and 9 both use the same OLI sensor, so they're spectrally compatible – important for multi-year comparison. Point to the timeline image and mention the 20 scenes spanning 9 years.</a:t>
-            </a:r>
+              <a:t>“For this project, we used Landsat 8 and Landsat 9 Level-2 Surface Reflectance imagery obtained from USGS.</a:t>
+            </a:r>
+          </a:p>
+          <a:p>
+            <a:endParaRPr lang="en-US" dirty="0"/>
+          </a:p>
+          <a:p>
+            <a:r>
+              <a:rPr lang="en-US" dirty="0"/>
+              <a:t>We selected images between February 2016 and March 2025, giving us a total of 20 scenes. We mainly selected February and March because these months belong to the dry season in North Western Sri Lanka, which reduces cloud cover and improves image quality.</a:t>
+            </a:r>
+          </a:p>
+          <a:p>
+            <a:endParaRPr lang="en-US" dirty="0"/>
+          </a:p>
+          <a:p>
+            <a:r>
+              <a:rPr lang="en-US" dirty="0"/>
+              <a:t>The native image resolution was 30 </a:t>
+            </a:r>
+            <a:r>
+              <a:rPr lang="en-US" dirty="0" err="1"/>
+              <a:t>metres</a:t>
+            </a:r>
+            <a:r>
+              <a:rPr lang="en-US" dirty="0"/>
+              <a:t>, and both Landsat 8 and 9 use the same OLI sensor, which ensures spectral consistency for long-term comparison.</a:t>
+            </a:r>
+          </a:p>
+          <a:p>
+            <a:endParaRPr lang="en-US" dirty="0"/>
+          </a:p>
+          <a:p>
+            <a:r>
+              <a:rPr lang="en-US" dirty="0"/>
+              <a:t>The timeline shown here illustrates all image acquisition dates used throughout the study.”</a:t>
+            </a:r>
+          </a:p>
+          <a:p>
+            <a:endParaRPr lang="en-US" dirty="0"/>
           </a:p>
         </p:txBody>
       </p:sp>
@@ -1255,8 +1741,122 @@
           <a:p>
             <a:r>
               <a:rPr lang="en-US" dirty="0"/>
-              <a:t>Walk through the preprocessing steps. Mention catogirizingData.py first – it reads the date from each filename using regex and moves files into YYYY_MM folders, which makes the whole pipeline chronologically ordered automatically. Then cover reflectance scaling – converting digital numbers to actual reflectance values. Cloud masking was really important; some scenes had over 60% cloud cover, so those pixels were excluded. The persistent land mask is a clever trick – if a pixel was classified as water in more than 60% of all scenes, we just permanently masked it as ocean or lagoon and ignored it for vegetation analysis.</a:t>
-            </a:r>
+              <a:t>“Before analysis, the satellite images had to be preprocessed.</a:t>
+            </a:r>
+          </a:p>
+          <a:p>
+            <a:endParaRPr lang="en-US" dirty="0"/>
+          </a:p>
+          <a:p>
+            <a:r>
+              <a:rPr lang="en-US" dirty="0"/>
+              <a:t>First, we </a:t>
+            </a:r>
+            <a:r>
+              <a:rPr lang="en-US" dirty="0" err="1"/>
+              <a:t>organised</a:t>
+            </a:r>
+            <a:r>
+              <a:rPr lang="en-US" dirty="0"/>
+              <a:t> the raw files using a Python script called </a:t>
+            </a:r>
+            <a:r>
+              <a:rPr lang="en-US" i="1" dirty="0"/>
+              <a:t>categorizingData.py</a:t>
+            </a:r>
+            <a:r>
+              <a:rPr lang="en-US" dirty="0"/>
+              <a:t>, which automatically grouped files into folders based on acquisition date.</a:t>
+            </a:r>
+          </a:p>
+          <a:p>
+            <a:endParaRPr lang="en-US" dirty="0"/>
+          </a:p>
+          <a:p>
+            <a:r>
+              <a:rPr lang="en-US" dirty="0"/>
+              <a:t>Next, we converted Landsat digital numbers into actual surface reflectance values using reflectance scaling.</a:t>
+            </a:r>
+          </a:p>
+          <a:p>
+            <a:endParaRPr lang="en-US" dirty="0"/>
+          </a:p>
+          <a:p>
+            <a:r>
+              <a:rPr lang="en-US" dirty="0"/>
+              <a:t>Then we reduced image resolution from 30 </a:t>
+            </a:r>
+            <a:r>
+              <a:rPr lang="en-US" dirty="0" err="1"/>
+              <a:t>metres</a:t>
+            </a:r>
+            <a:r>
+              <a:rPr lang="en-US" dirty="0"/>
+              <a:t> to 60 </a:t>
+            </a:r>
+            <a:r>
+              <a:rPr lang="en-US" dirty="0" err="1"/>
+              <a:t>metres</a:t>
+            </a:r>
+            <a:r>
+              <a:rPr lang="en-US" dirty="0"/>
+              <a:t> using bilinear </a:t>
+            </a:r>
+            <a:r>
+              <a:rPr lang="en-US" dirty="0" err="1"/>
+              <a:t>downsampling</a:t>
+            </a:r>
+            <a:r>
+              <a:rPr lang="en-US" dirty="0"/>
+              <a:t> to reduce computational load and memory usage.</a:t>
+            </a:r>
+          </a:p>
+          <a:p>
+            <a:endParaRPr lang="en-US" dirty="0"/>
+          </a:p>
+          <a:p>
+            <a:r>
+              <a:rPr lang="en-US" dirty="0"/>
+              <a:t>One of the most important preprocessing steps was cloud masking. Using the QA_PIXEL band, we removed cloud, shadow, and cirrus pixels to improve reliability.</a:t>
+            </a:r>
+          </a:p>
+          <a:p>
+            <a:endParaRPr lang="en-US" dirty="0"/>
+          </a:p>
+          <a:p>
+            <a:r>
+              <a:rPr lang="en-US" dirty="0"/>
+              <a:t>Finally, we created a persistent land mask using NDWI to permanently exclude ocean and lagoon regions from vegetation analysis.”</a:t>
+            </a:r>
+          </a:p>
+          <a:p>
+            <a:endParaRPr lang="en-US" dirty="0"/>
+          </a:p>
+          <a:p>
+            <a:pPr marL="0" marR="0" lvl="0" indent="0" algn="l" defTabSz="914400" rtl="0" eaLnBrk="1" fontAlgn="auto" latinLnBrk="0" hangingPunct="1">
+              <a:lnSpc>
+                <a:spcPct val="100000"/>
+              </a:lnSpc>
+              <a:spcBef>
+                <a:spcPts val="0"/>
+              </a:spcBef>
+              <a:spcAft>
+                <a:spcPts val="0"/>
+              </a:spcAft>
+              <a:buClrTx/>
+              <a:buSzTx/>
+              <a:buFontTx/>
+              <a:buNone/>
+              <a:tabLst/>
+              <a:defRPr/>
+            </a:pPr>
+            <a:r>
+              <a:rPr lang="en-US" dirty="0"/>
+              <a:t>“Next, Member 3 will explain our methodology and machine learning process.”</a:t>
+            </a:r>
+          </a:p>
+          <a:p>
+            <a:endParaRPr lang="en-US" dirty="0"/>
           </a:p>
         </p:txBody>
       </p:sp>
@@ -1342,7 +1942,67 @@
           <a:p>
             <a:r>
               <a:rPr lang="en-US" dirty="0"/>
-              <a:t>Explain the overall pipeline flow. Everything ran inside one Jupyter Notebook – retrain.ipynb. We processed each of the 20 scenes through all seven stages in order. Step 3 computes the spectral indices, Step 4 runs the Random Forest classifier, Step 5 does the change detection, and Step 6 generates the forecasts. The histogram graph shows how NDVI distributions shifted over time – you can already see that the high-NDVI peak moved lower in more recent years, which hints at vegetation loss before we even get to the change detection results.</a:t>
+              <a:t>“Our entire workflow was implemented in Python using a single </a:t>
+            </a:r>
+            <a:r>
+              <a:rPr lang="en-US" dirty="0" err="1"/>
+              <a:t>Jupyter</a:t>
+            </a:r>
+            <a:r>
+              <a:rPr lang="en-US" dirty="0"/>
+              <a:t> Notebook called </a:t>
+            </a:r>
+            <a:r>
+              <a:rPr lang="en-US" i="1" dirty="0" err="1"/>
+              <a:t>retrain.ipynb</a:t>
+            </a:r>
+            <a:r>
+              <a:rPr lang="en-US" dirty="0"/>
+              <a:t>.</a:t>
+            </a:r>
+          </a:p>
+          <a:p>
+            <a:endParaRPr lang="en-US" dirty="0"/>
+          </a:p>
+          <a:p>
+            <a:r>
+              <a:rPr lang="en-US" dirty="0"/>
+              <a:t>The process followed seven stages. We first collected Landsat data, then carried out preprocessing and spectral index computation.</a:t>
+            </a:r>
+          </a:p>
+          <a:p>
+            <a:endParaRPr lang="en-US" dirty="0"/>
+          </a:p>
+          <a:p>
+            <a:r>
+              <a:rPr lang="en-US" dirty="0"/>
+              <a:t>After that, we performed land cover classification using machine learning, followed by change detection and forecasting.</a:t>
+            </a:r>
+          </a:p>
+          <a:p>
+            <a:endParaRPr lang="en-US" dirty="0"/>
+          </a:p>
+          <a:p>
+            <a:r>
+              <a:rPr lang="en-US" dirty="0"/>
+              <a:t>Finally, we </a:t>
+            </a:r>
+            <a:r>
+              <a:rPr lang="en-US" dirty="0" err="1"/>
+              <a:t>analysed</a:t>
+            </a:r>
+            <a:r>
+              <a:rPr lang="en-US" dirty="0"/>
+              <a:t> the outputs to identify environmental trends.</a:t>
+            </a:r>
+          </a:p>
+          <a:p>
+            <a:endParaRPr lang="en-US" dirty="0"/>
+          </a:p>
+          <a:p>
+            <a:r>
+              <a:rPr lang="en-US" dirty="0"/>
+              <a:t>The NDVI histogram shown here already hints at vegetation decline over time because the distribution shifts toward lower values in later years.”</a:t>
             </a:r>
           </a:p>
         </p:txBody>
@@ -1429,7 +2089,43 @@
           <a:p>
             <a:r>
               <a:rPr lang="en-US" dirty="0"/>
-              <a:t>Explain the five spectral indices. NDVI is the most important one for this project – it's the primary metric we track over time. Point out the formula strip on each card. EVI is worth mentioning because it handles dense canopy better than NDVI – useful in areas like mangrove patches. The NDVI map strip at the bottom shows all 20 scenes; you can literally see the colour changing from greener scenes in 2016–2017 toward redder scenes in the 2022–2023 period. That visual alone supports the deforestation finding.</a:t>
+              <a:t>“We calculated five spectral indices for every scene.</a:t>
+            </a:r>
+          </a:p>
+          <a:p>
+            <a:endParaRPr lang="en-US" dirty="0"/>
+          </a:p>
+          <a:p>
+            <a:r>
+              <a:rPr lang="en-US" dirty="0"/>
+              <a:t>The most important was NDVI, which measures vegetation health and density and was our main indicator of vegetation change.</a:t>
+            </a:r>
+          </a:p>
+          <a:p>
+            <a:endParaRPr lang="en-US" dirty="0"/>
+          </a:p>
+          <a:p>
+            <a:r>
+              <a:rPr lang="en-US" dirty="0"/>
+              <a:t>NDWI was used to detect water bodies and create the land mask. NDBI highlighted built-up areas, while NBR helped identify dry or stressed land.</a:t>
+            </a:r>
+          </a:p>
+          <a:p>
+            <a:endParaRPr lang="en-US" dirty="0"/>
+          </a:p>
+          <a:p>
+            <a:r>
+              <a:rPr lang="en-US" dirty="0"/>
+              <a:t>We also used EVI, which improves vegetation detection in dense canopy regions by correcting atmospheric and soil effects.</a:t>
+            </a:r>
+          </a:p>
+          <a:p>
+            <a:endParaRPr lang="en-US" dirty="0"/>
+          </a:p>
+          <a:p>
+            <a:r>
+              <a:rPr lang="en-US" dirty="0"/>
+              <a:t>At the bottom, the NDVI maps show visible vegetation changes across all 20 scenes.”</a:t>
             </a:r>
           </a:p>
         </p:txBody>
@@ -1516,7 +2212,61 @@
           <a:p>
             <a:r>
               <a:rPr lang="en-US" dirty="0"/>
-              <a:t>Describe how the Random Forest was trained. The key point here is the pseudo-labelling approach – we automatically generated training labels from the spectral index thresholds, so we didn't need field surveys or manual annotation. Point to the confusion matrix and explain that the in-scene accuracy is very high – nearly perfect – but that's partly because the test labels came from the same thresholds we used to generate features. The cross-scene validation on three unseen scenes is the more honest result, and you can see that the 11-feature model outperforms the bands-only version. The before/after map at the bottom right clearly shows the green areas in 2016 being replaced by brown bare soil in 2025.</a:t>
+              <a:t>“To classify land cover, we used a Random Forest machine learning classifier.</a:t>
+            </a:r>
+          </a:p>
+          <a:p>
+            <a:endParaRPr lang="en-US" dirty="0"/>
+          </a:p>
+          <a:p>
+            <a:r>
+              <a:rPr lang="en-US" dirty="0"/>
+              <a:t>The model used 11 features: six Landsat bands plus five spectral indices.</a:t>
+            </a:r>
+          </a:p>
+          <a:p>
+            <a:endParaRPr lang="en-US" dirty="0"/>
+          </a:p>
+          <a:p>
+            <a:r>
+              <a:rPr lang="en-US" dirty="0"/>
+              <a:t>Since manual labelling of millions of pixels is extremely difficult, we used a pseudo-labelling approach. This means training labels were automatically generated using spectral thresholds.</a:t>
+            </a:r>
+          </a:p>
+          <a:p>
+            <a:endParaRPr lang="en-US" dirty="0"/>
+          </a:p>
+          <a:p>
+            <a:r>
+              <a:rPr lang="en-US" dirty="0"/>
+              <a:t>For example, high NDVI values represented vegetation, while high NDWI values indicated water.</a:t>
+            </a:r>
+          </a:p>
+          <a:p>
+            <a:endParaRPr lang="en-US" dirty="0"/>
+          </a:p>
+          <a:p>
+            <a:r>
+              <a:rPr lang="en-US" dirty="0"/>
+              <a:t>The model classified pixels into four categories: water, vegetation, bare soil, and built-up land.</a:t>
+            </a:r>
+          </a:p>
+          <a:p>
+            <a:endParaRPr lang="en-US" dirty="0"/>
+          </a:p>
+          <a:p>
+            <a:r>
+              <a:rPr lang="en-US" dirty="0"/>
+              <a:t>We also validated the model on unseen scenes, and results showed that the full 11-feature model performed better than using raw bands alone.”</a:t>
+            </a:r>
+          </a:p>
+          <a:p>
+            <a:endParaRPr lang="en-US" dirty="0"/>
+          </a:p>
+          <a:p>
+            <a:r>
+              <a:rPr lang="en-US" dirty="0"/>
+              <a:t>“Now Member 4 will discuss our results and key findings.”</a:t>
             </a:r>
           </a:p>
         </p:txBody>
@@ -2008,7 +2758,7 @@
         </p:nvSpPr>
         <p:spPr>
           <a:xfrm>
-            <a:off x="457200" y="2423160"/>
+            <a:off x="457200" y="2688336"/>
             <a:ext cx="5303520" cy="548640"/>
           </a:xfrm>
           <a:prstGeom prst="rect">
@@ -2064,7 +2814,7 @@
         </p:nvSpPr>
         <p:spPr>
           <a:xfrm>
-            <a:off x="6245352" y="306324"/>
+            <a:off x="6245352" y="411480"/>
             <a:ext cx="2834640" cy="4434840"/>
           </a:xfrm>
           <a:prstGeom prst="rect">
@@ -2128,7 +2878,7 @@
         </p:nvSpPr>
         <p:spPr>
           <a:xfrm>
-            <a:off x="6355080" y="658368"/>
+            <a:off x="6355080" y="1565003"/>
             <a:ext cx="2468880" cy="182880"/>
           </a:xfrm>
           <a:prstGeom prst="rect">
@@ -2167,7 +2917,7 @@
         </p:nvSpPr>
         <p:spPr>
           <a:xfrm>
-            <a:off x="6355080" y="822960"/>
+            <a:off x="6405372" y="1734167"/>
             <a:ext cx="2468880" cy="237744"/>
           </a:xfrm>
           <a:prstGeom prst="rect">
@@ -2192,7 +2942,7 @@
                 <a:ea typeface="Calibri" pitchFamily="34" charset="-122"/>
                 <a:cs typeface="Calibri" pitchFamily="34" charset="-120"/>
               </a:rPr>
-              <a:t>Image Processing – Group Project</a:t>
+              <a:t>Image Processing </a:t>
             </a:r>
             <a:endParaRPr lang="en-US" sz="1000" dirty="0"/>
           </a:p>
@@ -2206,7 +2956,7 @@
         </p:nvSpPr>
         <p:spPr>
           <a:xfrm>
-            <a:off x="6355080" y="1225296"/>
+            <a:off x="6355080" y="2131931"/>
             <a:ext cx="2468880" cy="182880"/>
           </a:xfrm>
           <a:prstGeom prst="rect">
@@ -2245,7 +2995,7 @@
         </p:nvSpPr>
         <p:spPr>
           <a:xfrm>
-            <a:off x="6355080" y="1389888"/>
+            <a:off x="6416040" y="2313795"/>
             <a:ext cx="2468880" cy="237744"/>
           </a:xfrm>
           <a:prstGeom prst="rect">
@@ -2284,7 +3034,7 @@
         </p:nvSpPr>
         <p:spPr>
           <a:xfrm>
-            <a:off x="6355080" y="1792224"/>
+            <a:off x="6355080" y="2599799"/>
             <a:ext cx="2468880" cy="182880"/>
           </a:xfrm>
           <a:prstGeom prst="rect">
@@ -2323,7 +3073,7 @@
         </p:nvSpPr>
         <p:spPr>
           <a:xfrm>
-            <a:off x="6355080" y="1956816"/>
+            <a:off x="6405372" y="2849118"/>
             <a:ext cx="2468880" cy="347472"/>
           </a:xfrm>
           <a:prstGeom prst="rect">
@@ -2457,7 +3207,7 @@
         </p:nvSpPr>
         <p:spPr>
           <a:xfrm>
-            <a:off x="6336792" y="2340864"/>
+            <a:off x="6336792" y="3247499"/>
             <a:ext cx="2468880" cy="182880"/>
           </a:xfrm>
           <a:prstGeom prst="rect">
@@ -2496,7 +3246,7 @@
         </p:nvSpPr>
         <p:spPr>
           <a:xfrm>
-            <a:off x="6405372" y="2505456"/>
+            <a:off x="6405372" y="3412091"/>
             <a:ext cx="2468880" cy="237744"/>
           </a:xfrm>
           <a:prstGeom prst="rect">
@@ -2531,7 +3281,7 @@
         </p:nvSpPr>
         <p:spPr>
           <a:xfrm>
-            <a:off x="6329172" y="2775204"/>
+            <a:off x="6329172" y="3681839"/>
             <a:ext cx="2468880" cy="182880"/>
           </a:xfrm>
           <a:prstGeom prst="rect">
@@ -2570,7 +3320,7 @@
         </p:nvSpPr>
         <p:spPr>
           <a:xfrm>
-            <a:off x="6416040" y="2907792"/>
+            <a:off x="6416040" y="3814427"/>
             <a:ext cx="2468880" cy="237744"/>
           </a:xfrm>
           <a:prstGeom prst="rect">
@@ -2598,6 +3348,201 @@
               <a:t>19th May, 2026 </a:t>
             </a:r>
             <a:endParaRPr lang="en-US" sz="1000" dirty="0"/>
+          </a:p>
+        </p:txBody>
+      </p:sp>
+      <p:sp>
+        <p:nvSpPr>
+          <p:cNvPr id="19" name="AutoShape 2" descr="Map of the location of Kalpitiya Peninsula  ">
+            <a:extLst>
+              <a:ext uri="{FF2B5EF4-FFF2-40B4-BE49-F238E27FC236}">
+                <a16:creationId xmlns:a16="http://schemas.microsoft.com/office/drawing/2014/main" id="{7B965AEE-C52A-FD66-248F-8B9EF77323A6}"/>
+              </a:ext>
+            </a:extLst>
+          </p:cNvPr>
+          <p:cNvSpPr>
+            <a:spLocks noChangeAspect="1" noChangeArrowheads="1"/>
+          </p:cNvSpPr>
+          <p:nvPr/>
+        </p:nvSpPr>
+        <p:spPr bwMode="auto">
+          <a:xfrm>
+            <a:off x="4419600" y="2419350"/>
+            <a:ext cx="1741170" cy="1741170"/>
+          </a:xfrm>
+          <a:prstGeom prst="rect">
+            <a:avLst/>
+          </a:prstGeom>
+          <a:noFill/>
+          <a:extLst>
+            <a:ext uri="{909E8E84-426E-40DD-AFC4-6F175D3DCCD1}">
+              <a14:hiddenFill xmlns:a14="http://schemas.microsoft.com/office/drawing/2010/main">
+                <a:solidFill>
+                  <a:srgbClr val="FFFFFF"/>
+                </a:solidFill>
+              </a14:hiddenFill>
+            </a:ext>
+          </a:extLst>
+        </p:spPr>
+        <p:txBody>
+          <a:bodyPr vert="horz" wrap="square" lIns="91440" tIns="45720" rIns="91440" bIns="45720" numCol="1" anchor="t" anchorCtr="0" compatLnSpc="1">
+            <a:prstTxWarp prst="textNoShape">
+              <a:avLst/>
+            </a:prstTxWarp>
+          </a:bodyPr>
+          <a:lstStyle/>
+          <a:p>
+            <a:endParaRPr lang="en-US"/>
+          </a:p>
+        </p:txBody>
+      </p:sp>
+      <p:pic>
+        <p:nvPicPr>
+          <p:cNvPr id="1030" name="Picture 6" descr="Puttalam Region Sri Lanka Extruded Physical Stock Footage Video (100%  Royalty-free) 3771725573 | Shutterstock">
+            <a:extLst>
+              <a:ext uri="{FF2B5EF4-FFF2-40B4-BE49-F238E27FC236}">
+                <a16:creationId xmlns:a16="http://schemas.microsoft.com/office/drawing/2014/main" id="{DE4A0654-88D4-93A4-7293-BCF65D3C1700}"/>
+              </a:ext>
+            </a:extLst>
+          </p:cNvPr>
+          <p:cNvPicPr>
+            <a:picLocks noChangeAspect="1" noChangeArrowheads="1"/>
+          </p:cNvPicPr>
+          <p:nvPr/>
+        </p:nvPicPr>
+        <p:blipFill>
+          <a:blip r:embed="rId3">
+            <a:extLst>
+              <a:ext uri="{BEBA8EAE-BF5A-486C-A8C5-ECC9F3942E4B}">
+                <a14:imgProps xmlns:a14="http://schemas.microsoft.com/office/drawing/2010/main">
+                  <a14:imgLayer r:embed="rId4">
+                    <a14:imgEffect>
+                      <a14:backgroundRemoval t="10000" b="90000" l="10000" r="90000"/>
+                    </a14:imgEffect>
+                    <a14:imgEffect>
+                      <a14:saturation sat="66000"/>
+                    </a14:imgEffect>
+                  </a14:imgLayer>
+                </a14:imgProps>
+              </a:ext>
+              <a:ext uri="{28A0092B-C50C-407E-A947-70E740481C1C}">
+                <a14:useLocalDpi xmlns:a14="http://schemas.microsoft.com/office/drawing/2010/main" val="0"/>
+              </a:ext>
+            </a:extLst>
+          </a:blip>
+          <a:srcRect/>
+          <a:stretch>
+            <a:fillRect/>
+          </a:stretch>
+        </p:blipFill>
+        <p:spPr bwMode="auto">
+          <a:xfrm>
+            <a:off x="1998262" y="2000014"/>
+            <a:ext cx="5401476" cy="3038330"/>
+          </a:xfrm>
+          <a:prstGeom prst="rect">
+            <a:avLst/>
+          </a:prstGeom>
+          <a:noFill/>
+          <a:extLst>
+            <a:ext uri="{909E8E84-426E-40DD-AFC4-6F175D3DCCD1}">
+              <a14:hiddenFill xmlns:a14="http://schemas.microsoft.com/office/drawing/2010/main">
+                <a:solidFill>
+                  <a:srgbClr val="FFFFFF"/>
+                </a:solidFill>
+              </a14:hiddenFill>
+            </a:ext>
+          </a:extLst>
+        </p:spPr>
+      </p:pic>
+      <p:sp>
+        <p:nvSpPr>
+          <p:cNvPr id="22" name="TextBox 21">
+            <a:extLst>
+              <a:ext uri="{FF2B5EF4-FFF2-40B4-BE49-F238E27FC236}">
+                <a16:creationId xmlns:a16="http://schemas.microsoft.com/office/drawing/2014/main" id="{7BE679ED-2061-0F60-E51D-ED78B24C4CF8}"/>
+              </a:ext>
+            </a:extLst>
+          </p:cNvPr>
+          <p:cNvSpPr txBox="1"/>
+          <p:nvPr/>
+        </p:nvSpPr>
+        <p:spPr>
+          <a:xfrm>
+            <a:off x="731521" y="2398067"/>
+            <a:ext cx="4572000" cy="276999"/>
+          </a:xfrm>
+          <a:prstGeom prst="rect">
+            <a:avLst/>
+          </a:prstGeom>
+          <a:noFill/>
+        </p:spPr>
+        <p:txBody>
+          <a:bodyPr wrap="square">
+            <a:spAutoFit/>
+          </a:bodyPr>
+          <a:lstStyle/>
+          <a:p>
+            <a:r>
+              <a:rPr lang="pt-BR" sz="1200" b="0" i="0" dirty="0">
+                <a:solidFill>
+                  <a:schemeClr val="accent6">
+                    <a:lumMod val="40000"/>
+                    <a:lumOff val="60000"/>
+                  </a:schemeClr>
+                </a:solidFill>
+                <a:effectLst/>
+                <a:latin typeface="Mona Sans VF"/>
+              </a:rPr>
+              <a:t>Lat </a:t>
+            </a:r>
+            <a:r>
+              <a:rPr lang="pt-BR" sz="1200" b="0" i="0" dirty="0">
+                <a:solidFill>
+                  <a:schemeClr val="accent6">
+                    <a:lumMod val="40000"/>
+                    <a:lumOff val="60000"/>
+                  </a:schemeClr>
+                </a:solidFill>
+                <a:effectLst/>
+                <a:latin typeface="Monaspace Neon"/>
+              </a:rPr>
+              <a:t>8.00° – 8.65° N</a:t>
+            </a:r>
+            <a:r>
+              <a:rPr lang="pt-BR" sz="1200" b="0" i="0" dirty="0">
+                <a:solidFill>
+                  <a:schemeClr val="accent6">
+                    <a:lumMod val="40000"/>
+                    <a:lumOff val="60000"/>
+                  </a:schemeClr>
+                </a:solidFill>
+                <a:effectLst/>
+                <a:latin typeface="Mona Sans VF"/>
+              </a:rPr>
+              <a:t> Lon </a:t>
+            </a:r>
+            <a:r>
+              <a:rPr lang="pt-BR" sz="1200" b="0" i="0" dirty="0">
+                <a:solidFill>
+                  <a:schemeClr val="accent6">
+                    <a:lumMod val="40000"/>
+                    <a:lumOff val="60000"/>
+                  </a:schemeClr>
+                </a:solidFill>
+                <a:effectLst/>
+                <a:latin typeface="Monaspace Neon"/>
+              </a:rPr>
+              <a:t>79.68° – 79.90° E</a:t>
+            </a:r>
+            <a:endParaRPr lang="en-US" sz="1200" dirty="0">
+              <a:solidFill>
+                <a:schemeClr val="accent6">
+                  <a:lumMod val="40000"/>
+                  <a:lumOff val="60000"/>
+                </a:schemeClr>
+              </a:solidFill>
+            </a:endParaRPr>
           </a:p>
         </p:txBody>
       </p:sp>
@@ -2738,7 +3683,7 @@
                 <a:ea typeface="Calibri" pitchFamily="34" charset="-122"/>
                 <a:cs typeface="Calibri" pitchFamily="34" charset="-120"/>
               </a:rPr>
-              <a:t>Change Detection Results</a:t>
+              <a:t>09 Change Detection Results</a:t>
             </a:r>
             <a:endParaRPr lang="en-US" sz="2200" dirty="0"/>
           </a:p>
@@ -3731,7 +4676,7 @@
                 <a:ea typeface="Calibri" pitchFamily="34" charset="-122"/>
                 <a:cs typeface="Calibri" pitchFamily="34" charset="-120"/>
               </a:rPr>
-              <a:t>Land Cover Transitions &amp; Hotspots</a:t>
+              <a:t>10 Land Cover Transitions &amp; Hotspots</a:t>
             </a:r>
             <a:endParaRPr lang="en-US" sz="2200" dirty="0"/>
           </a:p>
@@ -4339,7 +5284,7 @@
                 <a:ea typeface="Calibri" pitchFamily="34" charset="-122"/>
                 <a:cs typeface="Calibri" pitchFamily="34" charset="-120"/>
               </a:rPr>
-              <a:t>Forecasting Results</a:t>
+              <a:t>11 Forecasting Results</a:t>
             </a:r>
             <a:endParaRPr lang="en-US" sz="2200" dirty="0"/>
           </a:p>
@@ -5247,7 +6192,7 @@
                 <a:ea typeface="Calibri" pitchFamily="34" charset="-122"/>
                 <a:cs typeface="Calibri" pitchFamily="34" charset="-120"/>
               </a:rPr>
-              <a:t>Results &amp; Discussion</a:t>
+              <a:t>12 Results &amp; Discussion</a:t>
             </a:r>
             <a:endParaRPr lang="en-US" sz="2200" dirty="0"/>
           </a:p>
@@ -6567,6 +7512,51 @@
               <a:t>14</a:t>
             </a:r>
             <a:endParaRPr lang="en-US" sz="900" dirty="0"/>
+          </a:p>
+        </p:txBody>
+      </p:sp>
+      <p:sp>
+        <p:nvSpPr>
+          <p:cNvPr id="9" name="Text 3">
+            <a:extLst>
+              <a:ext uri="{FF2B5EF4-FFF2-40B4-BE49-F238E27FC236}">
+                <a16:creationId xmlns:a16="http://schemas.microsoft.com/office/drawing/2014/main" id="{EF5FF1E6-A57E-743E-8DE4-BB59859E5B27}"/>
+              </a:ext>
+            </a:extLst>
+          </p:cNvPr>
+          <p:cNvSpPr/>
+          <p:nvPr/>
+        </p:nvSpPr>
+        <p:spPr>
+          <a:xfrm>
+            <a:off x="411480" y="128016"/>
+            <a:ext cx="8321040" cy="475488"/>
+          </a:xfrm>
+          <a:prstGeom prst="rect">
+            <a:avLst/>
+          </a:prstGeom>
+          <a:noFill/>
+          <a:ln/>
+        </p:spPr>
+        <p:txBody>
+          <a:bodyPr wrap="square" lIns="0" tIns="0" rIns="0" bIns="0" rtlCol="0" anchor="ctr"/>
+          <a:lstStyle/>
+          <a:p>
+            <a:pPr marL="0" indent="0" algn="l">
+              <a:buNone/>
+            </a:pPr>
+            <a:r>
+              <a:rPr lang="en-US" sz="2200" b="1" dirty="0">
+                <a:solidFill>
+                  <a:srgbClr val="1A4731"/>
+                </a:solidFill>
+                <a:latin typeface="Calibri" pitchFamily="34" charset="0"/>
+                <a:ea typeface="Calibri" pitchFamily="34" charset="-122"/>
+                <a:cs typeface="Calibri" pitchFamily="34" charset="-120"/>
+              </a:rPr>
+              <a:t>13 Limitations and Future Improvements</a:t>
+            </a:r>
+            <a:endParaRPr lang="en-US" sz="2200" dirty="0"/>
           </a:p>
         </p:txBody>
       </p:sp>
@@ -6673,7 +7663,7 @@
                 <a:ea typeface="Calibri" pitchFamily="34" charset="-122"/>
                 <a:cs typeface="Calibri" pitchFamily="34" charset="-120"/>
               </a:rPr>
-              <a:t>Conclusion</a:t>
+              <a:t>14 Conclusion</a:t>
             </a:r>
             <a:endParaRPr lang="en-US" sz="2200" dirty="0"/>
           </a:p>
@@ -7680,7 +8670,7 @@
                 <a:ea typeface="Calibri" pitchFamily="34" charset="-122"/>
                 <a:cs typeface="Calibri" pitchFamily="34" charset="-120"/>
               </a:rPr>
-              <a:t>Introduction</a:t>
+              <a:t>01 Introduction</a:t>
             </a:r>
             <a:endParaRPr lang="en-US" sz="2200" dirty="0"/>
           </a:p>
@@ -8962,7 +9952,7 @@
                 <a:ea typeface="Calibri" pitchFamily="34" charset="-122"/>
                 <a:cs typeface="Calibri" pitchFamily="34" charset="-120"/>
               </a:rPr>
-              <a:t>Background</a:t>
+              <a:t>02 Background</a:t>
             </a:r>
             <a:endParaRPr lang="en-US" sz="2200" dirty="0"/>
           </a:p>
@@ -9815,7 +10805,7 @@
                 <a:ea typeface="Calibri" pitchFamily="34" charset="-122"/>
                 <a:cs typeface="Calibri" pitchFamily="34" charset="-120"/>
               </a:rPr>
-              <a:t>Project Objectives</a:t>
+              <a:t>03 Project Objectives</a:t>
             </a:r>
             <a:endParaRPr lang="en-US" sz="2400" dirty="0"/>
           </a:p>
@@ -10885,7 +11875,7 @@
                 <a:ea typeface="Calibri" pitchFamily="34" charset="-122"/>
                 <a:cs typeface="Calibri" pitchFamily="34" charset="-120"/>
               </a:rPr>
-              <a:t>Dataset Description</a:t>
+              <a:t>04 Dataset Description</a:t>
             </a:r>
             <a:endParaRPr lang="en-US" sz="2200" dirty="0"/>
           </a:p>
@@ -11995,7 +12985,7 @@
                 <a:ea typeface="Calibri" pitchFamily="34" charset="-122"/>
                 <a:cs typeface="Calibri" pitchFamily="34" charset="-120"/>
               </a:rPr>
-              <a:t>Data Preprocessing</a:t>
+              <a:t>05 Data Preprocessing</a:t>
             </a:r>
             <a:endParaRPr lang="en-US" sz="2200" dirty="0"/>
           </a:p>
@@ -13163,7 +14153,7 @@
                 <a:ea typeface="Calibri" pitchFamily="34" charset="-122"/>
                 <a:cs typeface="Calibri" pitchFamily="34" charset="-120"/>
               </a:rPr>
-              <a:t>Methodology Overview</a:t>
+              <a:t>06 Methodology Overview</a:t>
             </a:r>
             <a:endParaRPr lang="en-US" sz="2200" dirty="0"/>
           </a:p>
@@ -14932,7 +15922,7 @@
                 <a:ea typeface="Calibri" pitchFamily="34" charset="-122"/>
                 <a:cs typeface="Calibri" pitchFamily="34" charset="-120"/>
               </a:rPr>
-              <a:t>Spectral Indices</a:t>
+              <a:t>07 Spectral Indices</a:t>
             </a:r>
             <a:endParaRPr lang="en-US" sz="2200" dirty="0"/>
           </a:p>
@@ -16445,7 +17435,7 @@
                 <a:ea typeface="Calibri" pitchFamily="34" charset="-122"/>
                 <a:cs typeface="Calibri" pitchFamily="34" charset="-120"/>
               </a:rPr>
-              <a:t>Land Cover Classification</a:t>
+              <a:t>08 Land Cover Classification</a:t>
             </a:r>
             <a:endParaRPr lang="en-US" sz="2200" dirty="0"/>
           </a:p>
